--- a/GenAI/wk1/1_AI_Evolution_TraditionalAI_vs_GenAI.pptx
+++ b/GenAI/wk1/1_AI_Evolution_TraditionalAI_vs_GenAI.pptx
@@ -237,7 +237,7 @@
           <a:p>
             <a:fld id="{7BAEECA8-D063-486F-AE31-5020270C1449}" type="datetimeFigureOut">
               <a:rPr lang="en-US" smtClean="0"/>
-              <a:t>9/23/2026</a:t>
+              <a:t>10/13/2026</a:t>
             </a:fld>
             <a:endParaRPr lang="en-US"/>
           </a:p>
@@ -1498,7 +1498,7 @@
           <a:p>
             <a:fld id="{CB233BD1-3BA8-448D-9D08-7846095EA517}" type="datetimeFigureOut">
               <a:rPr lang="en-US" smtClean="0"/>
-              <a:t>9/23/2026</a:t>
+              <a:t>10/13/2026</a:t>
             </a:fld>
             <a:endParaRPr lang="en-US"/>
           </a:p>
@@ -1912,7 +1912,7 @@
           <a:p>
             <a:fld id="{6383FAE1-13DE-4511-8C1B-C8AFB720664C}" type="datetimeFigureOut">
               <a:rPr lang="en-US" smtClean="0"/>
-              <a:t>9/23/2026</a:t>
+              <a:t>10/13/2026</a:t>
             </a:fld>
             <a:endParaRPr lang="en-US"/>
           </a:p>
@@ -2110,7 +2110,7 @@
           <a:p>
             <a:fld id="{6383FAE1-13DE-4511-8C1B-C8AFB720664C}" type="datetimeFigureOut">
               <a:rPr lang="en-US" smtClean="0"/>
-              <a:t>9/23/2026</a:t>
+              <a:t>10/13/2026</a:t>
             </a:fld>
             <a:endParaRPr lang="en-US"/>
           </a:p>
@@ -2318,7 +2318,7 @@
           <a:p>
             <a:fld id="{6383FAE1-13DE-4511-8C1B-C8AFB720664C}" type="datetimeFigureOut">
               <a:rPr lang="en-US" smtClean="0"/>
-              <a:t>9/23/2026</a:t>
+              <a:t>10/13/2026</a:t>
             </a:fld>
             <a:endParaRPr lang="en-US"/>
           </a:p>
@@ -2516,7 +2516,7 @@
           <a:p>
             <a:fld id="{6383FAE1-13DE-4511-8C1B-C8AFB720664C}" type="datetimeFigureOut">
               <a:rPr lang="en-US" smtClean="0"/>
-              <a:t>9/23/2026</a:t>
+              <a:t>10/13/2026</a:t>
             </a:fld>
             <a:endParaRPr lang="en-US"/>
           </a:p>
@@ -2791,7 +2791,7 @@
           <a:p>
             <a:fld id="{6383FAE1-13DE-4511-8C1B-C8AFB720664C}" type="datetimeFigureOut">
               <a:rPr lang="en-US" smtClean="0"/>
-              <a:t>9/23/2026</a:t>
+              <a:t>10/13/2026</a:t>
             </a:fld>
             <a:endParaRPr lang="en-US"/>
           </a:p>
@@ -3056,7 +3056,7 @@
           <a:p>
             <a:fld id="{6383FAE1-13DE-4511-8C1B-C8AFB720664C}" type="datetimeFigureOut">
               <a:rPr lang="en-US" smtClean="0"/>
-              <a:t>9/23/2026</a:t>
+              <a:t>10/13/2026</a:t>
             </a:fld>
             <a:endParaRPr lang="en-US"/>
           </a:p>
@@ -3468,7 +3468,7 @@
           <a:p>
             <a:fld id="{6383FAE1-13DE-4511-8C1B-C8AFB720664C}" type="datetimeFigureOut">
               <a:rPr lang="en-US" smtClean="0"/>
-              <a:t>9/23/2026</a:t>
+              <a:t>10/13/2026</a:t>
             </a:fld>
             <a:endParaRPr lang="en-US"/>
           </a:p>
@@ -3609,7 +3609,7 @@
           <a:p>
             <a:fld id="{6383FAE1-13DE-4511-8C1B-C8AFB720664C}" type="datetimeFigureOut">
               <a:rPr lang="en-US" smtClean="0"/>
-              <a:t>9/23/2026</a:t>
+              <a:t>10/13/2026</a:t>
             </a:fld>
             <a:endParaRPr lang="en-US"/>
           </a:p>
@@ -3722,7 +3722,7 @@
           <a:p>
             <a:fld id="{6383FAE1-13DE-4511-8C1B-C8AFB720664C}" type="datetimeFigureOut">
               <a:rPr lang="en-US" smtClean="0"/>
-              <a:t>9/23/2026</a:t>
+              <a:t>10/13/2026</a:t>
             </a:fld>
             <a:endParaRPr lang="en-US"/>
           </a:p>
@@ -4033,7 +4033,7 @@
           <a:p>
             <a:fld id="{6383FAE1-13DE-4511-8C1B-C8AFB720664C}" type="datetimeFigureOut">
               <a:rPr lang="en-US" smtClean="0"/>
-              <a:t>9/23/2026</a:t>
+              <a:t>10/13/2026</a:t>
             </a:fld>
             <a:endParaRPr lang="en-US"/>
           </a:p>
@@ -4324,7 +4324,7 @@
           <a:p>
             <a:fld id="{6383FAE1-13DE-4511-8C1B-C8AFB720664C}" type="datetimeFigureOut">
               <a:rPr lang="en-US" smtClean="0"/>
-              <a:t>9/23/2026</a:t>
+              <a:t>10/13/2026</a:t>
             </a:fld>
             <a:endParaRPr lang="en-US"/>
           </a:p>
@@ -4568,7 +4568,7 @@
           <a:p>
             <a:fld id="{6383FAE1-13DE-4511-8C1B-C8AFB720664C}" type="datetimeFigureOut">
               <a:rPr lang="en-US" smtClean="0"/>
-              <a:t>9/23/2026</a:t>
+              <a:t>10/13/2026</a:t>
             </a:fld>
             <a:endParaRPr lang="en-US"/>
           </a:p>
@@ -6008,8 +6008,8 @@
           </a:prstGeom>
         </p:spPr>
       </p:pic>
-      <mc:AlternateContent xmlns:mc="http://schemas.openxmlformats.org/markup-compatibility/2006">
-        <mc:Choice xmlns:p14="http://schemas.microsoft.com/office/powerpoint/2010/main" Requires="p14">
+      <mc:AlternateContent xmlns:mc="http://schemas.openxmlformats.org/markup-compatibility/2006" xmlns:p14="http://schemas.microsoft.com/office/powerpoint/2010/main">
+        <mc:Choice Requires="p14">
           <p:contentPart p14:bwMode="auto" r:id="rId3">
             <p14:nvContentPartPr>
               <p14:cNvPr id="7" name="Ink 6">
@@ -6028,7 +6028,7 @@
             </p14:xfrm>
           </p:contentPart>
         </mc:Choice>
-        <mc:Fallback>
+        <mc:Fallback xmlns="">
           <p:pic>
             <p:nvPicPr>
               <p:cNvPr id="7" name="Ink 6">
@@ -6074,7 +6074,7 @@
         <p:spPr>
           <a:xfrm>
             <a:off x="2112264" y="658368"/>
-            <a:ext cx="2548070" cy="369332"/>
+            <a:ext cx="3347391" cy="461665"/>
           </a:xfrm>
           <a:prstGeom prst="rect">
             <a:avLst/>
@@ -6088,7 +6088,7 @@
           <a:lstStyle/>
           <a:p>
             <a:r>
-              <a:rPr lang="en-US" dirty="0">
+              <a:rPr lang="en-US" sz="2400" dirty="0">
                 <a:solidFill>
                   <a:schemeClr val="accent6">
                     <a:lumMod val="60000"/>
@@ -6099,7 +6099,7 @@
               <a:t>Response from </a:t>
             </a:r>
             <a:r>
-              <a:rPr lang="en-US" dirty="0" err="1">
+              <a:rPr lang="en-US" sz="2400" dirty="0" err="1">
                 <a:solidFill>
                   <a:schemeClr val="accent6">
                     <a:lumMod val="60000"/>
@@ -6109,7 +6109,7 @@
               </a:rPr>
               <a:t>Hostinger</a:t>
             </a:r>
-            <a:endParaRPr lang="en-IN" dirty="0">
+            <a:endParaRPr lang="en-IN" sz="2400" dirty="0">
               <a:solidFill>
                 <a:schemeClr val="accent6">
                   <a:lumMod val="60000"/>

--- a/GenAI/wk1/1_AI_Evolution_TraditionalAI_vs_GenAI.pptx
+++ b/GenAI/wk1/1_AI_Evolution_TraditionalAI_vs_GenAI.pptx
@@ -237,7 +237,7 @@
           <a:p>
             <a:fld id="{7BAEECA8-D063-486F-AE31-5020270C1449}" type="datetimeFigureOut">
               <a:rPr lang="en-US" smtClean="0"/>
-              <a:t>10/13/2026</a:t>
+              <a:t>10/26/2026</a:t>
             </a:fld>
             <a:endParaRPr lang="en-US"/>
           </a:p>
@@ -1498,7 +1498,7 @@
           <a:p>
             <a:fld id="{CB233BD1-3BA8-448D-9D08-7846095EA517}" type="datetimeFigureOut">
               <a:rPr lang="en-US" smtClean="0"/>
-              <a:t>10/13/2026</a:t>
+              <a:t>10/26/2026</a:t>
             </a:fld>
             <a:endParaRPr lang="en-US"/>
           </a:p>
@@ -1912,7 +1912,7 @@
           <a:p>
             <a:fld id="{6383FAE1-13DE-4511-8C1B-C8AFB720664C}" type="datetimeFigureOut">
               <a:rPr lang="en-US" smtClean="0"/>
-              <a:t>10/13/2026</a:t>
+              <a:t>10/26/2026</a:t>
             </a:fld>
             <a:endParaRPr lang="en-US"/>
           </a:p>
@@ -2110,7 +2110,7 @@
           <a:p>
             <a:fld id="{6383FAE1-13DE-4511-8C1B-C8AFB720664C}" type="datetimeFigureOut">
               <a:rPr lang="en-US" smtClean="0"/>
-              <a:t>10/13/2026</a:t>
+              <a:t>10/26/2026</a:t>
             </a:fld>
             <a:endParaRPr lang="en-US"/>
           </a:p>
@@ -2318,7 +2318,7 @@
           <a:p>
             <a:fld id="{6383FAE1-13DE-4511-8C1B-C8AFB720664C}" type="datetimeFigureOut">
               <a:rPr lang="en-US" smtClean="0"/>
-              <a:t>10/13/2026</a:t>
+              <a:t>10/26/2026</a:t>
             </a:fld>
             <a:endParaRPr lang="en-US"/>
           </a:p>
@@ -2516,7 +2516,7 @@
           <a:p>
             <a:fld id="{6383FAE1-13DE-4511-8C1B-C8AFB720664C}" type="datetimeFigureOut">
               <a:rPr lang="en-US" smtClean="0"/>
-              <a:t>10/13/2026</a:t>
+              <a:t>10/26/2026</a:t>
             </a:fld>
             <a:endParaRPr lang="en-US"/>
           </a:p>
@@ -2791,7 +2791,7 @@
           <a:p>
             <a:fld id="{6383FAE1-13DE-4511-8C1B-C8AFB720664C}" type="datetimeFigureOut">
               <a:rPr lang="en-US" smtClean="0"/>
-              <a:t>10/13/2026</a:t>
+              <a:t>10/26/2026</a:t>
             </a:fld>
             <a:endParaRPr lang="en-US"/>
           </a:p>
@@ -3056,7 +3056,7 @@
           <a:p>
             <a:fld id="{6383FAE1-13DE-4511-8C1B-C8AFB720664C}" type="datetimeFigureOut">
               <a:rPr lang="en-US" smtClean="0"/>
-              <a:t>10/13/2026</a:t>
+              <a:t>10/26/2026</a:t>
             </a:fld>
             <a:endParaRPr lang="en-US"/>
           </a:p>
@@ -3468,7 +3468,7 @@
           <a:p>
             <a:fld id="{6383FAE1-13DE-4511-8C1B-C8AFB720664C}" type="datetimeFigureOut">
               <a:rPr lang="en-US" smtClean="0"/>
-              <a:t>10/13/2026</a:t>
+              <a:t>10/26/2026</a:t>
             </a:fld>
             <a:endParaRPr lang="en-US"/>
           </a:p>
@@ -3609,7 +3609,7 @@
           <a:p>
             <a:fld id="{6383FAE1-13DE-4511-8C1B-C8AFB720664C}" type="datetimeFigureOut">
               <a:rPr lang="en-US" smtClean="0"/>
-              <a:t>10/13/2026</a:t>
+              <a:t>10/26/2026</a:t>
             </a:fld>
             <a:endParaRPr lang="en-US"/>
           </a:p>
@@ -3722,7 +3722,7 @@
           <a:p>
             <a:fld id="{6383FAE1-13DE-4511-8C1B-C8AFB720664C}" type="datetimeFigureOut">
               <a:rPr lang="en-US" smtClean="0"/>
-              <a:t>10/13/2026</a:t>
+              <a:t>10/26/2026</a:t>
             </a:fld>
             <a:endParaRPr lang="en-US"/>
           </a:p>
@@ -4033,7 +4033,7 @@
           <a:p>
             <a:fld id="{6383FAE1-13DE-4511-8C1B-C8AFB720664C}" type="datetimeFigureOut">
               <a:rPr lang="en-US" smtClean="0"/>
-              <a:t>10/13/2026</a:t>
+              <a:t>10/26/2026</a:t>
             </a:fld>
             <a:endParaRPr lang="en-US"/>
           </a:p>
@@ -4324,7 +4324,7 @@
           <a:p>
             <a:fld id="{6383FAE1-13DE-4511-8C1B-C8AFB720664C}" type="datetimeFigureOut">
               <a:rPr lang="en-US" smtClean="0"/>
-              <a:t>10/13/2026</a:t>
+              <a:t>10/26/2026</a:t>
             </a:fld>
             <a:endParaRPr lang="en-US"/>
           </a:p>
@@ -4568,7 +4568,7 @@
           <a:p>
             <a:fld id="{6383FAE1-13DE-4511-8C1B-C8AFB720664C}" type="datetimeFigureOut">
               <a:rPr lang="en-US" smtClean="0"/>
-              <a:t>10/13/2026</a:t>
+              <a:t>10/26/2026</a:t>
             </a:fld>
             <a:endParaRPr lang="en-US"/>
           </a:p>
@@ -5243,8 +5243,8 @@
         </p:nvSpPr>
         <p:spPr>
           <a:xfrm>
-            <a:off x="115824" y="1166842"/>
-            <a:ext cx="11960352" cy="4893647"/>
+            <a:off x="0" y="215866"/>
+            <a:ext cx="11960352" cy="2677656"/>
           </a:xfrm>
           <a:prstGeom prst="rect">
             <a:avLst/>
@@ -5413,7 +5413,18 @@
                   </a:schemeClr>
                 </a:solidFill>
               </a:rPr>
-              <a:t> led to major advancements in image and speech recognition.</a:t>
+              <a:t> led to major advancements in image and speech </a:t>
+            </a:r>
+            <a:r>
+              <a:rPr lang="en-IN" sz="2400">
+                <a:solidFill>
+                  <a:schemeClr val="accent6">
+                    <a:lumMod val="60000"/>
+                    <a:lumOff val="40000"/>
+                  </a:schemeClr>
+                </a:solidFill>
+              </a:rPr>
+              <a:t>recognition.</a:t>
             </a:r>
             <a:endParaRPr lang="en-US" sz="2400" dirty="0">
               <a:solidFill>
@@ -5424,17 +5435,122 @@
               </a:solidFill>
             </a:endParaRPr>
           </a:p>
-          <a:p>
-            <a:r>
-              <a:rPr lang="en-US" sz="2400" b="1" dirty="0">
-                <a:solidFill>
-                  <a:schemeClr val="accent6">
-                    <a:lumMod val="60000"/>
-                    <a:lumOff val="40000"/>
-                  </a:schemeClr>
-                </a:solidFill>
-              </a:rPr>
-              <a:t> </a:t>
+        </p:txBody>
+      </p:sp>
+      <p:sp>
+        <p:nvSpPr>
+          <p:cNvPr id="4" name="TextBox 3">
+            <a:extLst>
+              <a:ext uri="{FF2B5EF4-FFF2-40B4-BE49-F238E27FC236}">
+                <a16:creationId xmlns:a16="http://schemas.microsoft.com/office/drawing/2014/main" id="{20D23428-3755-7283-016A-5F3A669A717E}"/>
+              </a:ext>
+            </a:extLst>
+          </p:cNvPr>
+          <p:cNvSpPr txBox="1"/>
+          <p:nvPr/>
+        </p:nvSpPr>
+        <p:spPr>
+          <a:xfrm>
+            <a:off x="4825746" y="3308110"/>
+            <a:ext cx="6195060" cy="1938992"/>
+          </a:xfrm>
+          <a:prstGeom prst="rect">
+            <a:avLst/>
+          </a:prstGeom>
+          <a:noFill/>
+        </p:spPr>
+        <p:txBody>
+          <a:bodyPr wrap="square">
+            <a:spAutoFit/>
+          </a:bodyPr>
+          <a:lstStyle/>
+          <a:p>
+            <a:r>
+              <a:rPr lang="en-US" sz="2400" b="1">
+                <a:solidFill>
+                  <a:schemeClr val="accent6">
+                    <a:lumMod val="60000"/>
+                    <a:lumOff val="40000"/>
+                  </a:schemeClr>
+                </a:solidFill>
+              </a:rPr>
+              <a:t>Example:</a:t>
+            </a:r>
+            <a:endParaRPr lang="en-US" sz="2400">
+              <a:solidFill>
+                <a:schemeClr val="accent6">
+                  <a:lumMod val="60000"/>
+                  <a:lumOff val="40000"/>
+                </a:schemeClr>
+              </a:solidFill>
+            </a:endParaRPr>
+          </a:p>
+          <a:p>
+            <a:pPr marL="342900" lvl="0" indent="-342900">
+              <a:buFont typeface="Arial" panose="020B0604020202020204" pitchFamily="34" charset="0"/>
+              <a:buChar char="•"/>
+            </a:pPr>
+            <a:r>
+              <a:rPr lang="en-US" sz="2400">
+                <a:solidFill>
+                  <a:schemeClr val="accent6">
+                    <a:lumMod val="60000"/>
+                    <a:lumOff val="40000"/>
+                  </a:schemeClr>
+                </a:solidFill>
+              </a:rPr>
+              <a:t>Self-driving cars</a:t>
+            </a:r>
+          </a:p>
+          <a:p>
+            <a:pPr marL="342900" lvl="0" indent="-342900">
+              <a:buFont typeface="Arial" panose="020B0604020202020204" pitchFamily="34" charset="0"/>
+              <a:buChar char="•"/>
+            </a:pPr>
+            <a:r>
+              <a:rPr lang="en-US" sz="2400">
+                <a:solidFill>
+                  <a:schemeClr val="accent6">
+                    <a:lumMod val="60000"/>
+                    <a:lumOff val="40000"/>
+                  </a:schemeClr>
+                </a:solidFill>
+              </a:rPr>
+              <a:t>Facial recognition</a:t>
+            </a:r>
+          </a:p>
+          <a:p>
+            <a:pPr marL="342900" lvl="0" indent="-342900">
+              <a:buFont typeface="Arial" panose="020B0604020202020204" pitchFamily="34" charset="0"/>
+              <a:buChar char="•"/>
+            </a:pPr>
+            <a:r>
+              <a:rPr lang="en-US" sz="2400">
+                <a:solidFill>
+                  <a:schemeClr val="accent6">
+                    <a:lumMod val="60000"/>
+                    <a:lumOff val="40000"/>
+                  </a:schemeClr>
+                </a:solidFill>
+              </a:rPr>
+              <a:t>Real-time language </a:t>
+            </a:r>
+          </a:p>
+          <a:p>
+            <a:pPr marL="342900" lvl="0" indent="-342900">
+              <a:buFont typeface="Arial" panose="020B0604020202020204" pitchFamily="34" charset="0"/>
+              <a:buChar char="•"/>
+            </a:pPr>
+            <a:r>
+              <a:rPr lang="en-US" sz="2400">
+                <a:solidFill>
+                  <a:schemeClr val="accent6">
+                    <a:lumMod val="60000"/>
+                    <a:lumOff val="40000"/>
+                  </a:schemeClr>
+                </a:solidFill>
+              </a:rPr>
+              <a:t>Speech to Text</a:t>
             </a:r>
             <a:endParaRPr lang="en-US" sz="2400" dirty="0">
               <a:solidFill>
@@ -5444,95 +5560,6 @@
                 </a:schemeClr>
               </a:solidFill>
             </a:endParaRPr>
-          </a:p>
-          <a:p>
-            <a:r>
-              <a:rPr lang="en-US" sz="2400" b="1" dirty="0">
-                <a:solidFill>
-                  <a:schemeClr val="accent6">
-                    <a:lumMod val="60000"/>
-                    <a:lumOff val="40000"/>
-                  </a:schemeClr>
-                </a:solidFill>
-              </a:rPr>
-              <a:t>Example:</a:t>
-            </a:r>
-            <a:endParaRPr lang="en-US" sz="2400" dirty="0">
-              <a:solidFill>
-                <a:schemeClr val="accent6">
-                  <a:lumMod val="60000"/>
-                  <a:lumOff val="40000"/>
-                </a:schemeClr>
-              </a:solidFill>
-            </a:endParaRPr>
-          </a:p>
-          <a:p>
-            <a:pPr marL="342900" lvl="0" indent="-342900">
-              <a:buFont typeface="Arial" panose="020B0604020202020204" pitchFamily="34" charset="0"/>
-              <a:buChar char="•"/>
-            </a:pPr>
-            <a:r>
-              <a:rPr lang="en-US" sz="2400" dirty="0">
-                <a:solidFill>
-                  <a:schemeClr val="accent6">
-                    <a:lumMod val="60000"/>
-                    <a:lumOff val="40000"/>
-                  </a:schemeClr>
-                </a:solidFill>
-              </a:rPr>
-              <a:t>Self-driving cars</a:t>
-            </a:r>
-          </a:p>
-          <a:p>
-            <a:pPr marL="342900" lvl="0" indent="-342900">
-              <a:buFont typeface="Arial" panose="020B0604020202020204" pitchFamily="34" charset="0"/>
-              <a:buChar char="•"/>
-            </a:pPr>
-            <a:r>
-              <a:rPr lang="en-US" sz="2400" dirty="0">
-                <a:solidFill>
-                  <a:schemeClr val="accent6">
-                    <a:lumMod val="60000"/>
-                    <a:lumOff val="40000"/>
-                  </a:schemeClr>
-                </a:solidFill>
-              </a:rPr>
-              <a:t>Facial recognition</a:t>
-            </a:r>
-          </a:p>
-          <a:p>
-            <a:pPr marL="342900" lvl="0" indent="-342900">
-              <a:buFont typeface="Arial" panose="020B0604020202020204" pitchFamily="34" charset="0"/>
-              <a:buChar char="•"/>
-            </a:pPr>
-            <a:r>
-              <a:rPr lang="en-US" sz="2400" dirty="0">
-                <a:solidFill>
-                  <a:schemeClr val="accent6">
-                    <a:lumMod val="60000"/>
-                    <a:lumOff val="40000"/>
-                  </a:schemeClr>
-                </a:solidFill>
-              </a:rPr>
-              <a:t>Real-time language </a:t>
-            </a:r>
-          </a:p>
-          <a:p>
-            <a:pPr marL="342900" lvl="0" indent="-342900">
-              <a:buFont typeface="Arial" panose="020B0604020202020204" pitchFamily="34" charset="0"/>
-              <a:buChar char="•"/>
-            </a:pPr>
-            <a:r>
-              <a:rPr lang="en-US" sz="2400" dirty="0">
-                <a:solidFill>
-                  <a:schemeClr val="accent6">
-                    <a:lumMod val="60000"/>
-                    <a:lumOff val="40000"/>
-                  </a:schemeClr>
-                </a:solidFill>
-              </a:rPr>
-              <a:t>Speech to Text</a:t>
-            </a:r>
           </a:p>
         </p:txBody>
       </p:sp>
@@ -5586,8 +5613,8 @@
         </p:nvSpPr>
         <p:spPr>
           <a:xfrm>
-            <a:off x="0" y="1090507"/>
-            <a:ext cx="11960352" cy="3416320"/>
+            <a:off x="115824" y="212683"/>
+            <a:ext cx="11960352" cy="1569660"/>
           </a:xfrm>
           <a:prstGeom prst="rect">
             <a:avLst/>
@@ -5670,7 +5697,7 @@
               <a:t>These models generate brand new content: text, art, code, music—even </a:t>
             </a:r>
             <a:r>
-              <a:rPr lang="en-US" sz="2400" b="1" dirty="0">
+              <a:rPr lang="en-US" sz="2400" b="1">
                 <a:solidFill>
                   <a:schemeClr val="accent6">
                     <a:lumMod val="60000"/>
@@ -5681,7 +5708,7 @@
               <a:t>deepfakes</a:t>
             </a:r>
             <a:r>
-              <a:rPr lang="en-US" sz="2400" dirty="0">
+              <a:rPr lang="en-US" sz="2400">
                 <a:solidFill>
                   <a:schemeClr val="accent6">
                     <a:lumMod val="60000"/>
@@ -5690,32 +5717,6 @@
                 </a:solidFill>
               </a:rPr>
               <a:t>.</a:t>
-            </a:r>
-          </a:p>
-          <a:p>
-            <a:r>
-              <a:rPr lang="en-US" sz="2400" dirty="0">
-                <a:solidFill>
-                  <a:schemeClr val="accent6">
-                    <a:lumMod val="60000"/>
-                    <a:lumOff val="40000"/>
-                  </a:schemeClr>
-                </a:solidFill>
-              </a:rPr>
-              <a:t> </a:t>
-            </a:r>
-          </a:p>
-          <a:p>
-            <a:r>
-              <a:rPr lang="en-US" sz="2400" b="1" dirty="0">
-                <a:solidFill>
-                  <a:schemeClr val="accent6">
-                    <a:lumMod val="60000"/>
-                    <a:lumOff val="40000"/>
-                  </a:schemeClr>
-                </a:solidFill>
-              </a:rPr>
-              <a:t>Example:</a:t>
             </a:r>
             <a:endParaRPr lang="en-US" sz="2400" dirty="0">
               <a:solidFill>
@@ -5726,13 +5727,63 @@
               </a:solidFill>
             </a:endParaRPr>
           </a:p>
+        </p:txBody>
+      </p:sp>
+      <p:sp>
+        <p:nvSpPr>
+          <p:cNvPr id="4" name="TextBox 3">
+            <a:extLst>
+              <a:ext uri="{FF2B5EF4-FFF2-40B4-BE49-F238E27FC236}">
+                <a16:creationId xmlns:a16="http://schemas.microsoft.com/office/drawing/2014/main" id="{E7D8ECEB-33C6-0710-B471-C8CF3BBEB6E2}"/>
+              </a:ext>
+            </a:extLst>
+          </p:cNvPr>
+          <p:cNvSpPr txBox="1"/>
+          <p:nvPr/>
+        </p:nvSpPr>
+        <p:spPr>
+          <a:xfrm>
+            <a:off x="4869180" y="2934992"/>
+            <a:ext cx="6190488" cy="1569660"/>
+          </a:xfrm>
+          <a:prstGeom prst="rect">
+            <a:avLst/>
+          </a:prstGeom>
+          <a:noFill/>
+        </p:spPr>
+        <p:txBody>
+          <a:bodyPr wrap="square">
+            <a:spAutoFit/>
+          </a:bodyPr>
+          <a:lstStyle/>
+          <a:p>
+            <a:r>
+              <a:rPr lang="en-US" sz="2400" b="1">
+                <a:solidFill>
+                  <a:schemeClr val="accent6">
+                    <a:lumMod val="60000"/>
+                    <a:lumOff val="40000"/>
+                  </a:schemeClr>
+                </a:solidFill>
+              </a:rPr>
+              <a:t>Example:</a:t>
+            </a:r>
+            <a:endParaRPr lang="en-US" sz="2400">
+              <a:solidFill>
+                <a:schemeClr val="accent6">
+                  <a:lumMod val="60000"/>
+                  <a:lumOff val="40000"/>
+                </a:schemeClr>
+              </a:solidFill>
+            </a:endParaRPr>
+          </a:p>
           <a:p>
             <a:pPr marL="342900" lvl="0" indent="-342900">
               <a:buFont typeface="Arial" panose="020B0604020202020204" pitchFamily="34" charset="0"/>
               <a:buChar char="•"/>
             </a:pPr>
             <a:r>
-              <a:rPr lang="en-US" sz="2400" dirty="0">
+              <a:rPr lang="en-US" sz="2400">
                 <a:solidFill>
                   <a:schemeClr val="accent6">
                     <a:lumMod val="60000"/>
@@ -5749,7 +5800,7 @@
               <a:buChar char="•"/>
             </a:pPr>
             <a:r>
-              <a:rPr lang="en-US" sz="2400" dirty="0">
+              <a:rPr lang="en-US" sz="2400">
                 <a:solidFill>
                   <a:schemeClr val="accent6">
                     <a:lumMod val="60000"/>
@@ -5766,27 +5817,24 @@
               <a:buChar char="•"/>
             </a:pPr>
             <a:r>
-              <a:rPr lang="en-US" sz="2400" dirty="0" err="1">
-                <a:solidFill>
-                  <a:schemeClr val="accent6">
-                    <a:lumMod val="60000"/>
-                    <a:lumOff val="40000"/>
-                  </a:schemeClr>
-                </a:solidFill>
-              </a:rPr>
-              <a:t>MusicLM</a:t>
-            </a:r>
-            <a:r>
-              <a:rPr lang="en-US" sz="2400" dirty="0">
-                <a:solidFill>
-                  <a:schemeClr val="accent6">
-                    <a:lumMod val="60000"/>
-                    <a:lumOff val="40000"/>
-                  </a:schemeClr>
-                </a:solidFill>
-              </a:rPr>
-              <a:t> generating songs in custom styles</a:t>
-            </a:r>
+              <a:rPr lang="en-US" sz="2400">
+                <a:solidFill>
+                  <a:schemeClr val="accent6">
+                    <a:lumMod val="60000"/>
+                    <a:lumOff val="40000"/>
+                  </a:schemeClr>
+                </a:solidFill>
+              </a:rPr>
+              <a:t>MusicLM generating songs in custom styles</a:t>
+            </a:r>
+            <a:endParaRPr lang="en-US" sz="2400" dirty="0">
+              <a:solidFill>
+                <a:schemeClr val="accent6">
+                  <a:lumMod val="60000"/>
+                  <a:lumOff val="40000"/>
+                </a:schemeClr>
+              </a:solidFill>
+            </a:endParaRPr>
           </a:p>
         </p:txBody>
       </p:sp>
@@ -5870,7 +5918,7 @@
         </p:nvSpPr>
         <p:spPr>
           <a:xfrm>
-            <a:off x="351277" y="722376"/>
+            <a:off x="232405" y="82296"/>
             <a:ext cx="6296917" cy="461665"/>
           </a:xfrm>
           <a:prstGeom prst="rect">
@@ -15023,7 +15071,7 @@
         </p:nvSpPr>
         <p:spPr>
           <a:xfrm>
-            <a:off x="231648" y="1264243"/>
+            <a:off x="231648" y="1145371"/>
             <a:ext cx="11960352" cy="4154984"/>
           </a:xfrm>
           <a:prstGeom prst="rect">
@@ -16015,7 +16063,7 @@
         </p:nvSpPr>
         <p:spPr>
           <a:xfrm>
-            <a:off x="115824" y="1017355"/>
+            <a:off x="115824" y="752179"/>
             <a:ext cx="11960352" cy="1200329"/>
           </a:xfrm>
           <a:prstGeom prst="rect">
@@ -16376,8 +16424,8 @@
         </p:nvSpPr>
         <p:spPr>
           <a:xfrm>
-            <a:off x="231648" y="1218523"/>
-            <a:ext cx="11960352" cy="3416320"/>
+            <a:off x="115824" y="285835"/>
+            <a:ext cx="11960352" cy="1938992"/>
           </a:xfrm>
           <a:prstGeom prst="rect">
             <a:avLst/>
@@ -16413,6 +16461,17 @@
               <a:t>patterns in data</a:t>
             </a:r>
             <a:r>
+              <a:rPr lang="en-US" sz="2400">
+                <a:solidFill>
+                  <a:schemeClr val="accent6">
+                    <a:lumMod val="60000"/>
+                    <a:lumOff val="40000"/>
+                  </a:schemeClr>
+                </a:solidFill>
+              </a:rPr>
+              <a:t>. (AKA </a:t>
+            </a:r>
+            <a:r>
               <a:rPr lang="en-US" sz="2400" dirty="0">
                 <a:solidFill>
                   <a:schemeClr val="accent6">
@@ -16421,21 +16480,19 @@
                   </a:schemeClr>
                 </a:solidFill>
               </a:rPr>
-              <a:t>. This was aka as </a:t>
-            </a:r>
-            <a:r>
-              <a:rPr lang="en-US" sz="2400" b="1" dirty="0">
-                <a:solidFill>
-                  <a:schemeClr val="accent6">
-                    <a:lumMod val="60000"/>
-                    <a:lumOff val="40000"/>
-                  </a:schemeClr>
-                </a:solidFill>
-              </a:rPr>
-              <a:t>statistical learning</a:t>
-            </a:r>
-          </a:p>
-          <a:p>
+              <a:t>as </a:t>
+            </a:r>
+            <a:r>
+              <a:rPr lang="en-US" sz="2400" b="1">
+                <a:solidFill>
+                  <a:schemeClr val="accent6">
+                    <a:lumMod val="60000"/>
+                    <a:lumOff val="40000"/>
+                  </a:schemeClr>
+                </a:solidFill>
+              </a:rPr>
+              <a:t>statistical learning)</a:t>
+            </a:r>
             <a:endParaRPr lang="en-US" sz="2400" b="1" dirty="0">
               <a:solidFill>
                 <a:schemeClr val="accent6">
@@ -16446,6 +16503,16 @@
             </a:endParaRPr>
           </a:p>
           <a:p>
+            <a:endParaRPr lang="en-US" sz="2400" b="1" dirty="0">
+              <a:solidFill>
+                <a:schemeClr val="accent6">
+                  <a:lumMod val="60000"/>
+                  <a:lumOff val="40000"/>
+                </a:schemeClr>
+              </a:solidFill>
+            </a:endParaRPr>
+          </a:p>
+          <a:p>
             <a:r>
               <a:rPr lang="en-IN" sz="2400" b="1" dirty="0">
                 <a:solidFill>
@@ -16488,12 +16555,31 @@
                   </a:schemeClr>
                 </a:solidFill>
               </a:rPr>
-              <a:t>The development of more advanced ML algorithms, including support vector machines and decision trees.</a:t>
-            </a:r>
-          </a:p>
-          <a:p>
-            <a:pPr lvl="0"/>
-            <a:endParaRPr lang="en-US" sz="2400" b="1" dirty="0">
+              <a:t>The development of more advanced ML algorithms, including </a:t>
+            </a:r>
+            <a:r>
+              <a:rPr lang="en-IN" sz="2400" b="1" i="1" dirty="0">
+                <a:solidFill>
+                  <a:schemeClr val="accent6">
+                    <a:lumMod val="60000"/>
+                    <a:lumOff val="40000"/>
+                  </a:schemeClr>
+                </a:solidFill>
+              </a:rPr>
+              <a:t>support vector machines and decision </a:t>
+            </a:r>
+            <a:r>
+              <a:rPr lang="en-IN" sz="2400" b="1" i="1">
+                <a:solidFill>
+                  <a:schemeClr val="accent6">
+                    <a:lumMod val="60000"/>
+                    <a:lumOff val="40000"/>
+                  </a:schemeClr>
+                </a:solidFill>
+              </a:rPr>
+              <a:t>trees.</a:t>
+            </a:r>
+            <a:endParaRPr lang="en-IN" sz="2400" b="1" i="1" dirty="0">
               <a:solidFill>
                 <a:schemeClr val="accent6">
                   <a:lumMod val="60000"/>
@@ -16502,9 +16588,49 @@
               </a:solidFill>
             </a:endParaRPr>
           </a:p>
-          <a:p>
-            <a:r>
-              <a:rPr lang="en-US" sz="2400" b="1" dirty="0">
+        </p:txBody>
+      </p:sp>
+      <p:sp>
+        <p:nvSpPr>
+          <p:cNvPr id="4" name="TextBox 3">
+            <a:extLst>
+              <a:ext uri="{FF2B5EF4-FFF2-40B4-BE49-F238E27FC236}">
+                <a16:creationId xmlns:a16="http://schemas.microsoft.com/office/drawing/2014/main" id="{49B5557F-AA37-6DB3-6138-0B9AA9D1C8D8}"/>
+              </a:ext>
+            </a:extLst>
+          </p:cNvPr>
+          <p:cNvSpPr txBox="1"/>
+          <p:nvPr/>
+        </p:nvSpPr>
+        <p:spPr>
+          <a:xfrm>
+            <a:off x="5152644" y="3564142"/>
+            <a:ext cx="6190488" cy="2308324"/>
+          </a:xfrm>
+          <a:prstGeom prst="rect">
+            <a:avLst/>
+          </a:prstGeom>
+          <a:noFill/>
+        </p:spPr>
+        <p:txBody>
+          <a:bodyPr wrap="square">
+            <a:spAutoFit/>
+          </a:bodyPr>
+          <a:lstStyle/>
+          <a:p>
+            <a:pPr lvl="0"/>
+            <a:endParaRPr lang="en-US" sz="2400" b="1">
+              <a:solidFill>
+                <a:schemeClr val="accent6">
+                  <a:lumMod val="60000"/>
+                  <a:lumOff val="40000"/>
+                </a:schemeClr>
+              </a:solidFill>
+            </a:endParaRPr>
+          </a:p>
+          <a:p>
+            <a:r>
+              <a:rPr lang="en-US" sz="2400" b="1">
                 <a:solidFill>
                   <a:schemeClr val="accent6">
                     <a:lumMod val="60000"/>
@@ -16513,6 +16639,48 @@
                 </a:solidFill>
               </a:rPr>
               <a:t>Example:</a:t>
+            </a:r>
+            <a:endParaRPr lang="en-US" sz="2400">
+              <a:solidFill>
+                <a:schemeClr val="accent6">
+                  <a:lumMod val="60000"/>
+                  <a:lumOff val="40000"/>
+                </a:schemeClr>
+              </a:solidFill>
+            </a:endParaRPr>
+          </a:p>
+          <a:p>
+            <a:pPr marL="342900" lvl="0" indent="-342900">
+              <a:buFont typeface="Arial" panose="020B0604020202020204" pitchFamily="34" charset="0"/>
+              <a:buChar char="•"/>
+            </a:pPr>
+            <a:r>
+              <a:rPr lang="en-US" sz="2400">
+                <a:solidFill>
+                  <a:schemeClr val="accent6">
+                    <a:lumMod val="60000"/>
+                    <a:lumOff val="40000"/>
+                  </a:schemeClr>
+                </a:solidFill>
+              </a:rPr>
+              <a:t>Spam filters that learn to block new types of spam based on examples.</a:t>
+            </a:r>
+          </a:p>
+          <a:p>
+            <a:pPr marL="342900" lvl="0" indent="-342900">
+              <a:buFont typeface="Arial" panose="020B0604020202020204" pitchFamily="34" charset="0"/>
+              <a:buChar char="•"/>
+            </a:pPr>
+            <a:r>
+              <a:rPr lang="en-US" sz="2400">
+                <a:solidFill>
+                  <a:schemeClr val="accent6">
+                    <a:lumMod val="60000"/>
+                    <a:lumOff val="40000"/>
+                  </a:schemeClr>
+                </a:solidFill>
+              </a:rPr>
+              <a:t>Recommendation systems (like Amazon and Netflix)</a:t>
             </a:r>
             <a:endParaRPr lang="en-US" sz="2400" dirty="0">
               <a:solidFill>
@@ -16522,40 +16690,6 @@
                 </a:schemeClr>
               </a:solidFill>
             </a:endParaRPr>
-          </a:p>
-          <a:p>
-            <a:pPr marL="342900" lvl="0" indent="-342900">
-              <a:buFont typeface="Arial" panose="020B0604020202020204" pitchFamily="34" charset="0"/>
-              <a:buChar char="•"/>
-            </a:pPr>
-            <a:r>
-              <a:rPr lang="en-US" sz="2400" dirty="0">
-                <a:solidFill>
-                  <a:schemeClr val="accent6">
-                    <a:lumMod val="60000"/>
-                    <a:lumOff val="40000"/>
-                  </a:schemeClr>
-                </a:solidFill>
-              </a:rPr>
-              <a:t>Spam filters that learn to block new types of spam based on examples.</a:t>
-            </a:r>
-          </a:p>
-          <a:p>
-            <a:pPr marL="342900" lvl="0" indent="-342900">
-              <a:buFont typeface="Arial" panose="020B0604020202020204" pitchFamily="34" charset="0"/>
-              <a:buChar char="•"/>
-            </a:pPr>
-            <a:r>
-              <a:rPr lang="en-US" sz="2400" dirty="0">
-                <a:solidFill>
-                  <a:schemeClr val="accent6">
-                    <a:lumMod val="60000"/>
-                    <a:lumOff val="40000"/>
-                  </a:schemeClr>
-                </a:solidFill>
-              </a:rPr>
-              <a:t>Recommendation systems (like Amazon and Netflix)</a:t>
-            </a:r>
           </a:p>
         </p:txBody>
       </p:sp>
